--- a/_bench/dist/llm-corpus.pptx
+++ b/_bench/dist/llm-corpus.pptx
@@ -3546,45 +3546,52 @@
       </p:sp>
       <p:sp>
         <p:nvSpPr>
-          <p:cNvPr id="9" name="TextBox 8"/>
-          <p:cNvSpPr txBox="1"/>
+          <p:cNvPr id="9" name="Rounded Rectangle 8"/>
+          <p:cNvSpPr/>
           <p:nvPr/>
         </p:nvSpPr>
         <p:spPr>
           <a:xfrm>
             <a:off x="762000" y="5419725"/>
-            <a:ext cx="1141800" cy="457200"/>
-          </a:xfrm>
-          <a:prstGeom prst="rect">
+            <a:ext cx="1325612" cy="457200"/>
+          </a:xfrm>
+          <a:prstGeom prst="roundRect">
             <a:avLst/>
           </a:prstGeom>
           <a:solidFill>
             <a:srgbClr val="A78BFA"/>
           </a:solidFill>
-        </p:spPr>
-        <p:txBody>
-          <a:bodyPr wrap="square" lIns="0" rIns="0" tIns="0" bIns="0">
-            <a:spAutoFit/>
-          </a:bodyPr>
+          <a:ln>
+            <a:noFill/>
+          </a:ln>
+        </p:spPr>
+        <p:style>
+          <a:lnRef idx="1">
+            <a:schemeClr val="accent1"/>
+          </a:lnRef>
+          <a:fillRef idx="3">
+            <a:schemeClr val="accent1"/>
+          </a:fillRef>
+          <a:effectRef idx="2">
+            <a:schemeClr val="accent1"/>
+          </a:effectRef>
+          <a:fontRef idx="minor">
+            <a:schemeClr val="lt1"/>
+          </a:fontRef>
+        </p:style>
+        <p:txBody>
+          <a:bodyPr rtlCol="0" anchor="ctr"/>
           <a:lstStyle/>
           <a:p>
             <a:pPr algn="ctr"/>
-            <a:r>
-              <a:rPr sz="1125" b="1" i="0" u="none">
-                <a:solidFill>
-                  <a:srgbClr val="0A0A0F"/>
-                </a:solidFill>
-                <a:latin typeface="Inter"/>
-              </a:rPr>
-              <a:t>Get the CLI →</a:t>
-            </a:r>
-          </a:p>
-        </p:txBody>
-      </p:sp>
-      <p:sp>
-        <p:nvSpPr>
-          <p:cNvPr id="10" name="TextBox 9"/>
-          <p:cNvSpPr txBox="1"/>
+            <a:endParaRPr lang="en-US"/>
+          </a:p>
+        </p:txBody>
+      </p:sp>
+      <p:sp>
+        <p:nvSpPr>
+          <p:cNvPr id="10" name="Rounded Rectangle 9"/>
+          <p:cNvSpPr/>
           <p:nvPr/>
         </p:nvSpPr>
         <p:spPr>
@@ -3592,27 +3599,36 @@
             <a:off x="2201912" y="5419725"/>
             <a:ext cx="1498253" cy="457200"/>
           </a:xfrm>
-          <a:prstGeom prst="rect">
-            <a:avLst/>
-          </a:prstGeom>
-          <a:noFill/>
-        </p:spPr>
-        <p:txBody>
-          <a:bodyPr wrap="square" lIns="0" rIns="0" tIns="0" bIns="0">
-            <a:spAutoFit/>
-          </a:bodyPr>
+          <a:prstGeom prst="roundRect">
+            <a:avLst/>
+          </a:prstGeom>
+          <a:noFill/>
+          <a:ln w="9525">
+            <a:solidFill>
+              <a:srgbClr val="FFFFFF"/>
+            </a:solidFill>
+          </a:ln>
+        </p:spPr>
+        <p:style>
+          <a:lnRef idx="1">
+            <a:schemeClr val="accent1"/>
+          </a:lnRef>
+          <a:fillRef idx="3">
+            <a:schemeClr val="accent1"/>
+          </a:fillRef>
+          <a:effectRef idx="2">
+            <a:schemeClr val="accent1"/>
+          </a:effectRef>
+          <a:fontRef idx="minor">
+            <a:schemeClr val="lt1"/>
+          </a:fontRef>
+        </p:style>
+        <p:txBody>
+          <a:bodyPr rtlCol="0" anchor="ctr"/>
           <a:lstStyle/>
           <a:p>
             <a:pPr algn="ctr"/>
-            <a:r>
-              <a:rPr sz="1125" b="1" i="0" u="none">
-                <a:solidFill>
-                  <a:srgbClr val="F5F5F7"/>
-                </a:solidFill>
-                <a:latin typeface="Inter"/>
-              </a:rPr>
-              <a:t>Watch the demo</a:t>
-            </a:r>
+            <a:endParaRPr lang="en-US"/>
           </a:p>
         </p:txBody>
       </p:sp>
@@ -3909,16 +3925,16 @@
       </p:sp>
       <p:sp>
         <p:nvSpPr>
-          <p:cNvPr id="6" name="TextBox 5"/>
-          <p:cNvSpPr txBox="1"/>
+          <p:cNvPr id="6" name="Rounded Rectangle 5"/>
+          <p:cNvSpPr/>
           <p:nvPr/>
         </p:nvSpPr>
         <p:spPr>
           <a:xfrm>
             <a:off x="3818483" y="4457700"/>
-            <a:ext cx="2520739" cy="457200"/>
-          </a:xfrm>
-          <a:prstGeom prst="rect">
+            <a:ext cx="2900511" cy="457200"/>
+          </a:xfrm>
+          <a:prstGeom prst="roundRect">
             <a:avLst/>
           </a:prstGeom>
           <a:solidFill>
@@ -3926,60 +3942,74 @@
               <a:alpha val="6000"/>
             </a:srgbClr>
           </a:solidFill>
-        </p:spPr>
-        <p:txBody>
-          <a:bodyPr wrap="square" lIns="0" rIns="0" tIns="0" bIns="0">
-            <a:spAutoFit/>
-          </a:bodyPr>
+          <a:ln>
+            <a:noFill/>
+          </a:ln>
+        </p:spPr>
+        <p:style>
+          <a:lnRef idx="1">
+            <a:schemeClr val="accent1"/>
+          </a:lnRef>
+          <a:fillRef idx="3">
+            <a:schemeClr val="accent1"/>
+          </a:fillRef>
+          <a:effectRef idx="2">
+            <a:schemeClr val="accent1"/>
+          </a:effectRef>
+          <a:fontRef idx="minor">
+            <a:schemeClr val="lt1"/>
+          </a:fontRef>
+        </p:style>
+        <p:txBody>
+          <a:bodyPr rtlCol="0" anchor="ctr"/>
           <a:lstStyle/>
           <a:p>
             <a:pPr algn="ctr"/>
-            <a:r>
-              <a:rPr sz="1125" b="1" i="0" u="none">
-                <a:solidFill>
-                  <a:srgbClr val="F5F5F7"/>
-                </a:solidFill>
-                <a:latin typeface="Inter"/>
-              </a:rPr>
-              <a:t>curl -fsSL https://slidify.sh/install | sh</a:t>
-            </a:r>
-          </a:p>
-        </p:txBody>
-      </p:sp>
-      <p:sp>
-        <p:nvSpPr>
-          <p:cNvPr id="7" name="TextBox 6"/>
-          <p:cNvSpPr txBox="1"/>
+            <a:endParaRPr lang="en-US"/>
+          </a:p>
+        </p:txBody>
+      </p:sp>
+      <p:sp>
+        <p:nvSpPr>
+          <p:cNvPr id="7" name="Rounded Rectangle 6"/>
+          <p:cNvSpPr/>
           <p:nvPr/>
         </p:nvSpPr>
         <p:spPr>
           <a:xfrm>
             <a:off x="6833295" y="4457700"/>
-            <a:ext cx="1332533" cy="457200"/>
-          </a:xfrm>
-          <a:prstGeom prst="rect">
+            <a:ext cx="1540222" cy="457200"/>
+          </a:xfrm>
+          <a:prstGeom prst="roundRect">
             <a:avLst/>
           </a:prstGeom>
           <a:solidFill>
             <a:srgbClr val="A78BFA"/>
           </a:solidFill>
-        </p:spPr>
-        <p:txBody>
-          <a:bodyPr wrap="square" lIns="0" rIns="0" tIns="0" bIns="0">
-            <a:spAutoFit/>
-          </a:bodyPr>
+          <a:ln>
+            <a:noFill/>
+          </a:ln>
+        </p:spPr>
+        <p:style>
+          <a:lnRef idx="1">
+            <a:schemeClr val="accent1"/>
+          </a:lnRef>
+          <a:fillRef idx="3">
+            <a:schemeClr val="accent1"/>
+          </a:fillRef>
+          <a:effectRef idx="2">
+            <a:schemeClr val="accent1"/>
+          </a:effectRef>
+          <a:fontRef idx="minor">
+            <a:schemeClr val="lt1"/>
+          </a:fontRef>
+        </p:style>
+        <p:txBody>
+          <a:bodyPr rtlCol="0" anchor="ctr"/>
           <a:lstStyle/>
           <a:p>
             <a:pPr algn="ctr"/>
-            <a:r>
-              <a:rPr sz="1125" b="1" i="0" u="none">
-                <a:solidFill>
-                  <a:srgbClr val="0A0A0F"/>
-                </a:solidFill>
-                <a:latin typeface="Inter"/>
-              </a:rPr>
-              <a:t>Read the docs →</a:t>
-            </a:r>
+            <a:endParaRPr lang="en-US"/>
           </a:p>
         </p:txBody>
       </p:sp>
@@ -21093,7 +21123,49 @@
       </p:sp>
       <p:sp>
         <p:nvSpPr>
-          <p:cNvPr id="21" name="TextBox 20"/>
+          <p:cNvPr id="21" name="Rectangle 20"/>
+          <p:cNvSpPr/>
+          <p:nvPr/>
+        </p:nvSpPr>
+        <p:spPr>
+          <a:xfrm>
+            <a:off x="762000" y="4533900"/>
+            <a:ext cx="10668000" cy="9525"/>
+          </a:xfrm>
+          <a:prstGeom prst="rect">
+            <a:avLst/>
+          </a:prstGeom>
+          <a:noFill/>
+          <a:ln>
+            <a:noFill/>
+          </a:ln>
+        </p:spPr>
+        <p:style>
+          <a:lnRef idx="1">
+            <a:schemeClr val="accent1"/>
+          </a:lnRef>
+          <a:fillRef idx="3">
+            <a:schemeClr val="accent1"/>
+          </a:fillRef>
+          <a:effectRef idx="2">
+            <a:schemeClr val="accent1"/>
+          </a:effectRef>
+          <a:fontRef idx="minor">
+            <a:schemeClr val="lt1"/>
+          </a:fontRef>
+        </p:style>
+        <p:txBody>
+          <a:bodyPr rtlCol="0" anchor="ctr"/>
+          <a:lstStyle/>
+          <a:p>
+            <a:pPr algn="ctr"/>
+            <a:endParaRPr lang="en-US"/>
+          </a:p>
+        </p:txBody>
+      </p:sp>
+      <p:sp>
+        <p:nvSpPr>
+          <p:cNvPr id="22" name="TextBox 21"/>
           <p:cNvSpPr txBox="1"/>
           <p:nvPr/>
         </p:nvSpPr>
@@ -26483,8 +26555,8 @@
       </p:sp>
       <p:sp>
         <p:nvSpPr>
-          <p:cNvPr id="13" name="TextBox 12"/>
-          <p:cNvSpPr txBox="1"/>
+          <p:cNvPr id="13" name="Rounded Rectangle 12"/>
+          <p:cNvSpPr/>
           <p:nvPr/>
         </p:nvSpPr>
         <p:spPr>
@@ -26492,27 +26564,36 @@
             <a:off x="1076325" y="4924425"/>
             <a:ext cx="1264741" cy="381000"/>
           </a:xfrm>
-          <a:prstGeom prst="rect">
-            <a:avLst/>
-          </a:prstGeom>
-          <a:noFill/>
-        </p:spPr>
-        <p:txBody>
-          <a:bodyPr wrap="square" lIns="0" rIns="0" tIns="0" bIns="0">
-            <a:spAutoFit/>
-          </a:bodyPr>
+          <a:prstGeom prst="roundRect">
+            <a:avLst/>
+          </a:prstGeom>
+          <a:noFill/>
+          <a:ln w="9525">
+            <a:solidFill>
+              <a:srgbClr val="FFFFFF"/>
+            </a:solidFill>
+          </a:ln>
+        </p:spPr>
+        <p:style>
+          <a:lnRef idx="1">
+            <a:schemeClr val="accent1"/>
+          </a:lnRef>
+          <a:fillRef idx="3">
+            <a:schemeClr val="accent1"/>
+          </a:fillRef>
+          <a:effectRef idx="2">
+            <a:schemeClr val="accent1"/>
+          </a:effectRef>
+          <a:fontRef idx="minor">
+            <a:schemeClr val="lt1"/>
+          </a:fontRef>
+        </p:style>
+        <p:txBody>
+          <a:bodyPr rtlCol="0" anchor="ctr"/>
           <a:lstStyle/>
           <a:p>
             <a:pPr algn="ctr"/>
-            <a:r>
-              <a:rPr sz="1050" b="1" i="0" u="none">
-                <a:solidFill>
-                  <a:srgbClr val="F5F5F7"/>
-                </a:solidFill>
-                <a:latin typeface="Inter"/>
-              </a:rPr>
-              <a:t>Choose Hobby</a:t>
-            </a:r>
+            <a:endParaRPr lang="en-US"/>
           </a:p>
         </p:txBody>
       </p:sp>
@@ -31694,38 +31775,45 @@
       </p:sp>
       <p:sp>
         <p:nvSpPr>
-          <p:cNvPr id="30" name="TextBox 29"/>
-          <p:cNvSpPr txBox="1"/>
+          <p:cNvPr id="30" name="Rounded Rectangle 29"/>
+          <p:cNvSpPr/>
           <p:nvPr/>
         </p:nvSpPr>
         <p:spPr>
           <a:xfrm>
             <a:off x="9954518" y="4181475"/>
-            <a:ext cx="1303213" cy="381000"/>
-          </a:xfrm>
-          <a:prstGeom prst="rect">
+            <a:ext cx="1475482" cy="381000"/>
+          </a:xfrm>
+          <a:prstGeom prst="roundRect">
             <a:avLst/>
           </a:prstGeom>
           <a:solidFill>
             <a:srgbClr val="A78BFA"/>
           </a:solidFill>
-        </p:spPr>
-        <p:txBody>
-          <a:bodyPr wrap="square" lIns="0" rIns="0" tIns="0" bIns="0">
-            <a:spAutoFit/>
-          </a:bodyPr>
+          <a:ln>
+            <a:noFill/>
+          </a:ln>
+        </p:spPr>
+        <p:style>
+          <a:lnRef idx="1">
+            <a:schemeClr val="accent1"/>
+          </a:lnRef>
+          <a:fillRef idx="3">
+            <a:schemeClr val="accent1"/>
+          </a:fillRef>
+          <a:effectRef idx="2">
+            <a:schemeClr val="accent1"/>
+          </a:effectRef>
+          <a:fontRef idx="minor">
+            <a:schemeClr val="lt1"/>
+          </a:fontRef>
+        </p:style>
+        <p:txBody>
+          <a:bodyPr rtlCol="0" anchor="ctr"/>
           <a:lstStyle/>
           <a:p>
             <a:pPr algn="ctr"/>
-            <a:r>
-              <a:rPr sz="1050" b="1" i="0" u="none">
-                <a:solidFill>
-                  <a:srgbClr val="0A0A0F"/>
-                </a:solidFill>
-                <a:latin typeface="Inter"/>
-              </a:rPr>
-              <a:t>Join the waitlist →</a:t>
-            </a:r>
+            <a:endParaRPr lang="en-US"/>
           </a:p>
         </p:txBody>
       </p:sp>

--- a/_bench/dist/llm-corpus.pptx
+++ b/_bench/dist/llm-corpus.pptx
@@ -17602,7 +17602,7 @@
                 <a:solidFill>
                   <a:srgbClr val="0A0A0A"/>
                 </a:solidFill>
-                <a:latin typeface="Bebas Neue"/>
+                <a:latin typeface="Impact"/>
               </a:rPr>
               <a:t>PITCH</a:t>
             </a:r>
@@ -17637,7 +17637,7 @@
                 <a:solidFill>
                   <a:srgbClr val="0A0A0A"/>
                 </a:solidFill>
-                <a:latin typeface="Playfair Display"/>
+                <a:latin typeface="Cambria"/>
               </a:rPr>
               <a:t>Issue No. 04 · Spring 2026 · $14</a:t>
             </a:r>
@@ -17672,7 +17672,7 @@
                 <a:solidFill>
                   <a:srgbClr val="0A0A0A"/>
                 </a:solidFill>
-                <a:latin typeface="Playfair Display"/>
+                <a:latin typeface="Cambria"/>
               </a:rPr>
               <a:t>The cover story · pp. 24 — 31</a:t>
             </a:r>
@@ -17707,7 +17707,7 @@
                 <a:solidFill>
                   <a:srgbClr val="0A0A0A"/>
                 </a:solidFill>
-                <a:latin typeface="Bebas Neue"/>
+                <a:latin typeface="Impact"/>
               </a:rPr>
               <a:t>A FIELD GUIDE TO THE PAGE.</a:t>
             </a:r>
@@ -17744,7 +17744,7 @@
                 <a:solidFill>
                   <a:srgbClr val="E11D48"/>
                 </a:solidFill>
-                <a:latin typeface="Bebas Neue"/>
+                <a:latin typeface="Impact"/>
               </a:rPr>
               <a:t>EDITED</a:t>
             </a:r>
@@ -17779,7 +17779,7 @@
                 <a:solidFill>
                   <a:srgbClr val="0A0A0A"/>
                 </a:solidFill>
-                <a:latin typeface="Playfair Display"/>
+                <a:latin typeface="Cambria"/>
               </a:rPr>
               <a:t>By the editors</a:t>
             </a:r>
@@ -17814,7 +17814,7 @@
                 <a:solidFill>
                   <a:srgbClr val="0A0A0A"/>
                 </a:solidFill>
-                <a:latin typeface="Playfair Display"/>
+                <a:latin typeface="Cambria"/>
               </a:rPr>
               <a:t>a quiet revolution</a:t>
             </a:r>
@@ -18027,7 +18027,7 @@
                 <a:solidFill>
                   <a:srgbClr val="FFFFFF"/>
                 </a:solidFill>
-                <a:latin typeface="Bebas Neue"/>
+                <a:latin typeface="Impact"/>
               </a:rPr>
               <a:t>A NEW</a:t>
             </a:r>
@@ -18039,7 +18039,7 @@
                 <a:solidFill>
                   <a:srgbClr val="FFFFFF"/>
                 </a:solidFill>
-                <a:latin typeface="Bebas Neue"/>
+                <a:latin typeface="Impact"/>
               </a:rPr>
               <a:t>EDITORIAL ENGINE</a:t>
             </a:r>
@@ -18116,7 +18116,7 @@
                 <a:solidFill>
                   <a:srgbClr val="0A0A0A"/>
                 </a:solidFill>
-                <a:latin typeface="Bebas Neue"/>
+                <a:latin typeface="Impact"/>
               </a:rPr>
               <a:t>PP / 04</a:t>
             </a:r>
@@ -18151,7 +18151,7 @@
                 <a:solidFill>
                   <a:srgbClr val="0A0A0A"/>
                 </a:solidFill>
-                <a:latin typeface="Playfair Display"/>
+                <a:latin typeface="Cambria"/>
               </a:rPr>
               <a:t xml:space="preserve">Inside — how slidify rewrote the rules of editable presentations,
           why every shape matters, and the case for typographic restraint.</a:t>
@@ -18337,7 +18337,7 @@
                 <a:solidFill>
                   <a:srgbClr val="FFFFFF"/>
                 </a:solidFill>
-                <a:latin typeface="Playfair Display"/>
+                <a:latin typeface="Cambria"/>
               </a:rPr>
               <a:t>Photograph by — Studio Anonymous</a:t>
             </a:r>
@@ -18372,7 +18372,7 @@
                 <a:solidFill>
                   <a:srgbClr val="FFFFFF"/>
                 </a:solidFill>
-                <a:latin typeface="Bebas Neue"/>
+                <a:latin typeface="Impact"/>
               </a:rPr>
               <a:t>EDITORIAL</a:t>
             </a:r>
@@ -18384,7 +18384,7 @@
                 <a:solidFill>
                   <a:srgbClr val="FFFFFF"/>
                 </a:solidFill>
-                <a:latin typeface="Bebas Neue"/>
+                <a:latin typeface="Impact"/>
               </a:rPr>
               <a:t>FEATURE</a:t>
             </a:r>
@@ -18463,7 +18463,7 @@
                 <a:solidFill>
                   <a:srgbClr val="E11D48"/>
                 </a:solidFill>
-                <a:latin typeface="Playfair Display"/>
+                <a:latin typeface="Cambria"/>
               </a:rPr>
               <a:t>Pages 24 — 31</a:t>
             </a:r>
@@ -18498,7 +18498,7 @@
                 <a:solidFill>
                   <a:srgbClr val="0A0A0A"/>
                 </a:solidFill>
-                <a:latin typeface="Bebas Neue"/>
+                <a:latin typeface="Impact"/>
               </a:rPr>
               <a:t>A QUIET REVOLUTION</a:t>
             </a:r>
@@ -18510,7 +18510,7 @@
                 <a:solidFill>
                   <a:srgbClr val="0A0A0A"/>
                 </a:solidFill>
-                <a:latin typeface="Bebas Neue"/>
+                <a:latin typeface="Impact"/>
               </a:rPr>
               <a:t>IN PRESENTATION</a:t>
             </a:r>
@@ -18589,7 +18589,7 @@
                 <a:solidFill>
                   <a:srgbClr val="E11D48"/>
                 </a:solidFill>
-                <a:latin typeface="Bebas Neue"/>
+                <a:latin typeface="Impact"/>
               </a:rPr>
               <a:t>F</a:t>
             </a:r>
@@ -18624,7 +18624,7 @@
                 <a:solidFill>
                   <a:srgbClr val="E11D48"/>
                 </a:solidFill>
-                <a:latin typeface="Bebas Neue"/>
+                <a:latin typeface="Impact"/>
               </a:rPr>
               <a:t>F</a:t>
             </a:r>
@@ -18659,7 +18659,7 @@
                 <a:solidFill>
                   <a:srgbClr val="0A0A0A"/>
                 </a:solidFill>
-                <a:latin typeface="Playfair Display"/>
+                <a:latin typeface="Cambria"/>
               </a:rPr>
               <a:t>A. KAPLAN</a:t>
             </a:r>
@@ -18694,7 +18694,7 @@
                 <a:solidFill>
                   <a:srgbClr val="3F3F46"/>
                 </a:solidFill>
-                <a:latin typeface="Playfair Display"/>
+                <a:latin typeface="Cambria"/>
               </a:rPr>
               <a:t>4,200 words</a:t>
             </a:r>
@@ -18729,7 +18729,7 @@
                 <a:solidFill>
                   <a:srgbClr val="3F3F46"/>
                 </a:solidFill>
-                <a:latin typeface="Playfair Display"/>
+                <a:latin typeface="Cambria"/>
               </a:rPr>
               <a:t>continued page 28</a:t>
             </a:r>
@@ -18826,7 +18826,7 @@
                 <a:solidFill>
                   <a:srgbClr val="0A0A0A"/>
                 </a:solidFill>
-                <a:latin typeface="Helvetica Neue"/>
+                <a:latin typeface="Arial"/>
               </a:rPr>
               <a:t>MANI</a:t>
             </a:r>
@@ -18838,7 +18838,7 @@
                 <a:solidFill>
                   <a:srgbClr val="0A0A0A"/>
                 </a:solidFill>
-                <a:latin typeface="Helvetica Neue"/>
+                <a:latin typeface="Arial"/>
               </a:rPr>
               <a:t>FESTO</a:t>
             </a:r>
@@ -18910,7 +18910,7 @@
                 <a:solidFill>
                   <a:srgbClr val="0A0A0A"/>
                 </a:solidFill>
-                <a:latin typeface="Helvetica Neue"/>
+                <a:latin typeface="Arial"/>
               </a:rPr>
               <a:t xml:space="preserve">Four tenets we will not negotiate.
             Pin this above your desk.</a:t>
@@ -19030,7 +19030,7 @@
                 <a:solidFill>
                   <a:srgbClr val="0A0A0A"/>
                 </a:solidFill>
-                <a:latin typeface="Helvetica Neue"/>
+                <a:latin typeface="Arial"/>
               </a:rPr>
               <a:t>01</a:t>
             </a:r>
@@ -19065,7 +19065,7 @@
                 <a:solidFill>
                   <a:srgbClr val="0A0A0A"/>
                 </a:solidFill>
-                <a:latin typeface="Helvetica Neue"/>
+                <a:latin typeface="Arial"/>
               </a:rPr>
               <a:t>EVERY SHAPE IS EDITABLE.</a:t>
             </a:r>
@@ -19100,7 +19100,7 @@
                 <a:solidFill>
                   <a:srgbClr val="0A0A0A"/>
                 </a:solidFill>
-                <a:latin typeface="Helvetica Neue"/>
+                <a:latin typeface="Arial"/>
               </a:rPr>
               <a:t>The PPTX you ship is the artifact someone else will edit. No rasters, no apologies.</a:t>
             </a:r>
@@ -19177,7 +19177,7 @@
                 <a:solidFill>
                   <a:srgbClr val="0A0A0A"/>
                 </a:solidFill>
-                <a:latin typeface="Helvetica Neue"/>
+                <a:latin typeface="Arial"/>
               </a:rPr>
               <a:t>02</a:t>
             </a:r>
@@ -19212,7 +19212,7 @@
                 <a:solidFill>
                   <a:srgbClr val="0A0A0A"/>
                 </a:solidFill>
-                <a:latin typeface="Helvetica Neue"/>
+                <a:latin typeface="Arial"/>
               </a:rPr>
               <a:t>TYPE IS A FIRST-CLASS CITIZEN.</a:t>
             </a:r>
@@ -19247,7 +19247,7 @@
                 <a:solidFill>
                   <a:srgbClr val="0A0A0A"/>
                 </a:solidFill>
-                <a:latin typeface="Helvetica Neue"/>
+                <a:latin typeface="Arial"/>
               </a:rPr>
               <a:t>Glyphs survive the export with their tracking, leading, and weight intact. We do not flatten.</a:t>
             </a:r>
@@ -19324,7 +19324,7 @@
                 <a:solidFill>
                   <a:srgbClr val="0A0A0A"/>
                 </a:solidFill>
-                <a:latin typeface="Helvetica Neue"/>
+                <a:latin typeface="Arial"/>
               </a:rPr>
               <a:t>03</a:t>
             </a:r>
@@ -19359,7 +19359,7 @@
                 <a:solidFill>
                   <a:srgbClr val="0A0A0A"/>
                 </a:solidFill>
-                <a:latin typeface="Helvetica Neue"/>
+                <a:latin typeface="Arial"/>
               </a:rPr>
               <a:t>GRADIENTS ARE NATIVE.</a:t>
             </a:r>
@@ -19394,7 +19394,7 @@
                 <a:solidFill>
                   <a:srgbClr val="0A0A0A"/>
                 </a:solidFill>
-                <a:latin typeface="Helvetica Neue"/>
+                <a:latin typeface="Arial"/>
               </a:rPr>
               <a:t>Linear and radial fills emit as &lt;a:gradFill&gt;. PowerPoint colour-pickers stay accurate.</a:t>
             </a:r>
@@ -19471,7 +19471,7 @@
                 <a:solidFill>
                   <a:srgbClr val="0A0A0A"/>
                 </a:solidFill>
-                <a:latin typeface="Helvetica Neue"/>
+                <a:latin typeface="Arial"/>
               </a:rPr>
               <a:t>04</a:t>
             </a:r>
@@ -19506,7 +19506,7 @@
                 <a:solidFill>
                   <a:srgbClr val="0A0A0A"/>
                 </a:solidFill>
-                <a:latin typeface="Helvetica Neue"/>
+                <a:latin typeface="Arial"/>
               </a:rPr>
               <a:t>LLM-LEGIBLE BY CONSTRUCTION.</a:t>
             </a:r>
@@ -19541,7 +19541,7 @@
                 <a:solidFill>
                   <a:srgbClr val="0A0A0A"/>
                 </a:solidFill>
-                <a:latin typeface="Helvetica Neue"/>
+                <a:latin typeface="Arial"/>
               </a:rPr>
               <a:t>A pre-flight checker tells the model what works before the conversion runs. No surprises.</a:t>
             </a:r>
@@ -19750,7 +19750,7 @@
                 <a:solidFill>
                   <a:srgbClr val="0A0A0A"/>
                 </a:solidFill>
-                <a:latin typeface="Helvetica Neue"/>
+                <a:latin typeface="Arial"/>
               </a:rPr>
               <a:t xml:space="preserve">
           BY THE</a:t>
@@ -19763,7 +19763,7 @@
                 <a:solidFill>
                   <a:srgbClr val="0A0A0A"/>
                 </a:solidFill>
-                <a:latin typeface="Helvetica Neue"/>
+                <a:latin typeface="Arial"/>
               </a:rPr>
               <a:t>NUMBERS</a:t>
             </a:r>
@@ -19898,7 +19898,7 @@
                 <a:solidFill>
                   <a:srgbClr val="0A0A0A"/>
                 </a:solidFill>
-                <a:latin typeface="Helvetica Neue"/>
+                <a:latin typeface="Arial"/>
               </a:rPr>
               <a:t>87</a:t>
             </a:r>
@@ -19907,7 +19907,7 @@
                 <a:solidFill>
                   <a:srgbClr val="0A0A0A"/>
                 </a:solidFill>
-                <a:latin typeface="Helvetica Neue"/>
+                <a:latin typeface="Arial"/>
               </a:rPr>
               <a:t>%</a:t>
             </a:r>
@@ -19942,7 +19942,7 @@
                 <a:solidFill>
                   <a:srgbClr val="0A0A0A"/>
                 </a:solidFill>
-                <a:latin typeface="Helvetica Neue"/>
+                <a:latin typeface="Arial"/>
               </a:rPr>
               <a:t>of slide area emits as editable PPTX primitives.</a:t>
             </a:r>
@@ -20019,7 +20019,7 @@
                 <a:solidFill>
                   <a:srgbClr val="0A0A0A"/>
                 </a:solidFill>
-                <a:latin typeface="Helvetica Neue"/>
+                <a:latin typeface="Arial"/>
               </a:rPr>
               <a:t>0.12</a:t>
             </a:r>
@@ -20028,7 +20028,7 @@
                 <a:solidFill>
                   <a:srgbClr val="0A0A0A"/>
                 </a:solidFill>
-                <a:latin typeface="Helvetica Neue"/>
+                <a:latin typeface="Arial"/>
               </a:rPr>
               <a:t>%</a:t>
             </a:r>
@@ -20063,7 +20063,7 @@
                 <a:solidFill>
                   <a:srgbClr val="0A0A0A"/>
                 </a:solidFill>
-                <a:latin typeface="Helvetica Neue"/>
+                <a:latin typeface="Arial"/>
               </a:rPr>
               <a:t>average drift per slide vs. the source HTML.</a:t>
             </a:r>
@@ -20140,7 +20140,7 @@
                 <a:solidFill>
                   <a:srgbClr val="0A0A0A"/>
                 </a:solidFill>
-                <a:latin typeface="Helvetica Neue"/>
+                <a:latin typeface="Arial"/>
               </a:rPr>
               <a:t>155</a:t>
             </a:r>
@@ -20175,7 +20175,7 @@
                 <a:solidFill>
                   <a:srgbClr val="0A0A0A"/>
                 </a:solidFill>
-                <a:latin typeface="Helvetica Neue"/>
+                <a:latin typeface="Arial"/>
               </a:rPr>
               <a:t>atomic recipes shipped in atoms.yaml.</a:t>
             </a:r>
@@ -20252,7 +20252,7 @@
                 <a:solidFill>
                   <a:srgbClr val="0A0A0A"/>
                 </a:solidFill>
-                <a:latin typeface="Helvetica Neue"/>
+                <a:latin typeface="Arial"/>
               </a:rPr>
               <a:t>28</a:t>
             </a:r>
@@ -20261,7 +20261,7 @@
                 <a:solidFill>
                   <a:srgbClr val="0A0A0A"/>
                 </a:solidFill>
-                <a:latin typeface="Helvetica Neue"/>
+                <a:latin typeface="Arial"/>
               </a:rPr>
               <a:t>s</a:t>
             </a:r>
@@ -20296,7 +20296,7 @@
                 <a:solidFill>
                   <a:srgbClr val="0A0A0A"/>
                 </a:solidFill>
-                <a:latin typeface="Helvetica Neue"/>
+                <a:latin typeface="Arial"/>
               </a:rPr>
               <a:t>median end-to-end conversion for a 12-slide deck.</a:t>
             </a:r>
@@ -24851,7 +24851,7 @@
                 <a:solidFill>
                   <a:srgbClr val="0D1F3C"/>
                 </a:solidFill>
-                <a:latin typeface="Playfair Display"/>
+                <a:latin typeface="Cambria"/>
               </a:rPr>
               <a:t xml:space="preserve">
           The slides we ship are</a:t>
@@ -24864,7 +24864,7 @@
                 <a:solidFill>
                   <a:srgbClr val="FFECC4"/>
                 </a:solidFill>
-                <a:latin typeface="Playfair Display"/>
+                <a:latin typeface="Cambria"/>
               </a:rPr>
               <a:t>an act of editing,</a:t>
             </a:r>
@@ -24876,7 +24876,7 @@
                 <a:solidFill>
                   <a:srgbClr val="0D1F3C"/>
                 </a:solidFill>
-                <a:latin typeface="Playfair Display"/>
+                <a:latin typeface="Cambria"/>
               </a:rPr>
               <a:t xml:space="preserve">
           not an accident</a:t>
@@ -24889,7 +24889,7 @@
                 <a:solidFill>
                   <a:srgbClr val="0D1F3C"/>
                 </a:solidFill>
-                <a:latin typeface="Playfair Display"/>
+                <a:latin typeface="Cambria"/>
               </a:rPr>
               <a:t xml:space="preserve">of capture.
         </a:t>
@@ -30529,7 +30529,7 @@
                 <a:solidFill>
                   <a:srgbClr val="F5F5F7"/>
                 </a:solidFill>
-                <a:latin typeface="Tiempos"/>
+                <a:latin typeface="Cambria"/>
               </a:rPr>
               <a:t xml:space="preserve">Slidify is the first tool that actually understands what designers
         mean by “editable.”</a:t>

--- a/_bench/dist/llm-corpus.pptx
+++ b/_bench/dist/llm-corpus.pptx
@@ -17903,6 +17903,17 @@
           <a:prstGeom prst="ellipse">
             <a:avLst/>
           </a:prstGeom>
+          <a:gradFill flip="none" rotWithShape="1">
+            <a:gsLst>
+              <a:gs pos="0">
+                <a:srgbClr val="7A2C30"/>
+              </a:gs>
+              <a:gs pos="100000">
+                <a:srgbClr val="0A0A0A"/>
+              </a:gs>
+            </a:gsLst>
+            <a:lin ang="4398045" scaled="1"/>
+          </a:gradFill>
           <a:ln>
             <a:noFill/>
           </a:ln>
@@ -17972,6 +17983,17 @@
               </a:path>
             </a:pathLst>
           </a:custGeom>
+          <a:gradFill flip="none" rotWithShape="1">
+            <a:gsLst>
+              <a:gs pos="0">
+                <a:srgbClr val="7A2C30"/>
+              </a:gs>
+              <a:gs pos="100000">
+                <a:srgbClr val="0A0A0A"/>
+              </a:gs>
+            </a:gsLst>
+            <a:lin ang="4398045" scaled="1"/>
+          </a:gradFill>
           <a:ln>
             <a:noFill/>
           </a:ln>
@@ -23995,6 +24017,23 @@
           <a:prstGeom prst="rect">
             <a:avLst/>
           </a:prstGeom>
+          <a:gradFill flip="none" rotWithShape="1">
+            <a:gsLst>
+              <a:gs pos="0">
+                <a:srgbClr val="FFD9A0"/>
+              </a:gs>
+              <a:gs pos="35000">
+                <a:srgbClr val="FFB886"/>
+              </a:gs>
+              <a:gs pos="80000">
+                <a:srgbClr val="7A6285"/>
+              </a:gs>
+              <a:gs pos="100000">
+                <a:srgbClr val="1A2440"/>
+              </a:gs>
+            </a:gsLst>
+            <a:lin ang="5400000" scaled="1"/>
+          </a:gradFill>
           <a:ln>
             <a:noFill/>
           </a:ln>
@@ -24080,6 +24119,17 @@
           <a:prstGeom prst="rect">
             <a:avLst/>
           </a:prstGeom>
+          <a:gradFill flip="none" rotWithShape="1">
+            <a:gsLst>
+              <a:gs pos="0">
+                <a:srgbClr val="0D1F3C"/>
+              </a:gs>
+              <a:gs pos="100000">
+                <a:srgbClr val="050B1C"/>
+              </a:gs>
+            </a:gsLst>
+            <a:lin ang="5400000" scaled="1"/>
+          </a:gradFill>
           <a:ln>
             <a:noFill/>
           </a:ln>
@@ -24121,6 +24171,28 @@
           <a:prstGeom prst="rect">
             <a:avLst/>
           </a:prstGeom>
+          <a:gradFill flip="none" rotWithShape="1">
+            <a:gsLst>
+              <a:gs pos="0">
+                <a:srgbClr val="FFECC4">
+                  <a:alpha val="95000"/>
+                </a:srgbClr>
+              </a:gs>
+              <a:gs pos="35000">
+                <a:srgbClr val="FF7A59">
+                  <a:alpha val="55000"/>
+                </a:srgbClr>
+              </a:gs>
+              <a:gs pos="100000">
+                <a:srgbClr val="FF7A59">
+                  <a:alpha val="0"/>
+                </a:srgbClr>
+              </a:gs>
+            </a:gsLst>
+            <a:path path="circle">
+              <a:fillToRect l="66000" t="62000" r="34000" b="38000"/>
+            </a:path>
+          </a:gradFill>
           <a:ln>
             <a:noFill/>
           </a:ln>
@@ -24423,6 +24495,21 @@
           <a:prstGeom prst="ellipse">
             <a:avLst/>
           </a:prstGeom>
+          <a:gradFill flip="none" rotWithShape="1">
+            <a:gsLst>
+              <a:gs pos="0">
+                <a:srgbClr val="FFECC4">
+                  <a:alpha val="55000"/>
+                </a:srgbClr>
+              </a:gs>
+              <a:gs pos="100000">
+                <a:srgbClr val="FF7A59">
+                  <a:alpha val="0"/>
+                </a:srgbClr>
+              </a:gs>
+            </a:gsLst>
+            <a:lin ang="5400000" scaled="1"/>
+          </a:gradFill>
           <a:ln>
             <a:noFill/>
           </a:ln>
@@ -24497,6 +24584,20 @@
               </a:path>
             </a:pathLst>
           </a:custGeom>
+          <a:gradFill flip="none" rotWithShape="1">
+            <a:gsLst>
+              <a:gs pos="0">
+                <a:srgbClr val="1A2440"/>
+              </a:gs>
+              <a:gs pos="60000">
+                <a:srgbClr val="0A1124"/>
+              </a:gs>
+              <a:gs pos="100000">
+                <a:srgbClr val="04060F"/>
+              </a:gs>
+            </a:gsLst>
+            <a:lin ang="4721404" scaled="1"/>
+          </a:gradFill>
           <a:ln>
             <a:noFill/>
           </a:ln>
@@ -24538,6 +24639,20 @@
           <a:prstGeom prst="ellipse">
             <a:avLst/>
           </a:prstGeom>
+          <a:gradFill flip="none" rotWithShape="1">
+            <a:gsLst>
+              <a:gs pos="0">
+                <a:srgbClr val="1A2440"/>
+              </a:gs>
+              <a:gs pos="60000">
+                <a:srgbClr val="0A1124"/>
+              </a:gs>
+              <a:gs pos="100000">
+                <a:srgbClr val="04060F"/>
+              </a:gs>
+            </a:gsLst>
+            <a:lin ang="4721404" scaled="1"/>
+          </a:gradFill>
           <a:ln>
             <a:noFill/>
           </a:ln>
